--- a/Constructibilidad/Análisis generados/Presentacion_CPF2_INS_EL.pptx
+++ b/Constructibilidad/Análisis generados/Presentacion_CPF2_INS_EL.pptx
@@ -10136,7 +10136,7 @@
                           </a:solidFill>
                           <a:latin typeface="Calibri"/>
                         </a:rPr>
-                        <a:t>Inauco / HIMA</a:t>
+                        <a:t>HIMA</a:t>
                       </a:r>
                     </a:p>
                   </a:txBody>
@@ -10299,7 +10299,7 @@
                           </a:solidFill>
                           <a:latin typeface="Calibri"/>
                         </a:rPr>
-                        <a:t>Fuego y Gas — 120 dispositivos de campo (AESA)</a:t>
+                        <a:t>Fuego y Gas — detectores de campo (AESA) + HW</a:t>
                       </a:r>
                     </a:p>
                   </a:txBody>
@@ -10322,7 +10322,7 @@
                           </a:solidFill>
                           <a:latin typeface="Calibri"/>
                         </a:rPr>
-                        <a:t>AESA / Inauco</a:t>
+                        <a:t>AESA (det.) / HIMA (HW)</a:t>
                       </a:r>
                     </a:p>
                   </a:txBody>
